--- a/lectures/week_1_intro_to_R/ex1_intro_to_R.pptx
+++ b/lectures/week_1_intro_to_R/ex1_intro_to_R.pptx
@@ -201,7 +201,7 @@
           <a:p>
             <a:fld id="{E3F55388-6A8F-1341-9D1E-B023B27BE3D5}" type="datetimeFigureOut">
               <a:rPr lang="en-US" smtClean="0"/>
-              <a:t>1/18/24</a:t>
+              <a:t>1/21/26</a:t>
             </a:fld>
             <a:endParaRPr lang="en-US"/>
           </a:p>
@@ -615,7 +615,7 @@
           <a:p>
             <a:fld id="{FA0BDF2A-8048-BB44-864C-819C200F781C}" type="datetimeFigureOut">
               <a:rPr lang="en-US" smtClean="0"/>
-              <a:t>1/18/24</a:t>
+              <a:t>1/21/26</a:t>
             </a:fld>
             <a:endParaRPr lang="en-US"/>
           </a:p>
@@ -813,7 +813,7 @@
           <a:p>
             <a:fld id="{FA0BDF2A-8048-BB44-864C-819C200F781C}" type="datetimeFigureOut">
               <a:rPr lang="en-US" smtClean="0"/>
-              <a:t>1/18/24</a:t>
+              <a:t>1/21/26</a:t>
             </a:fld>
             <a:endParaRPr lang="en-US"/>
           </a:p>
@@ -1021,7 +1021,7 @@
           <a:p>
             <a:fld id="{FA0BDF2A-8048-BB44-864C-819C200F781C}" type="datetimeFigureOut">
               <a:rPr lang="en-US" smtClean="0"/>
-              <a:t>1/18/24</a:t>
+              <a:t>1/21/26</a:t>
             </a:fld>
             <a:endParaRPr lang="en-US"/>
           </a:p>
@@ -1219,7 +1219,7 @@
           <a:p>
             <a:fld id="{FA0BDF2A-8048-BB44-864C-819C200F781C}" type="datetimeFigureOut">
               <a:rPr lang="en-US" smtClean="0"/>
-              <a:t>1/18/24</a:t>
+              <a:t>1/21/26</a:t>
             </a:fld>
             <a:endParaRPr lang="en-US"/>
           </a:p>
@@ -1494,7 +1494,7 @@
           <a:p>
             <a:fld id="{FA0BDF2A-8048-BB44-864C-819C200F781C}" type="datetimeFigureOut">
               <a:rPr lang="en-US" smtClean="0"/>
-              <a:t>1/18/24</a:t>
+              <a:t>1/21/26</a:t>
             </a:fld>
             <a:endParaRPr lang="en-US"/>
           </a:p>
@@ -1759,7 +1759,7 @@
           <a:p>
             <a:fld id="{FA0BDF2A-8048-BB44-864C-819C200F781C}" type="datetimeFigureOut">
               <a:rPr lang="en-US" smtClean="0"/>
-              <a:t>1/18/24</a:t>
+              <a:t>1/21/26</a:t>
             </a:fld>
             <a:endParaRPr lang="en-US"/>
           </a:p>
@@ -2171,7 +2171,7 @@
           <a:p>
             <a:fld id="{FA0BDF2A-8048-BB44-864C-819C200F781C}" type="datetimeFigureOut">
               <a:rPr lang="en-US" smtClean="0"/>
-              <a:t>1/18/24</a:t>
+              <a:t>1/21/26</a:t>
             </a:fld>
             <a:endParaRPr lang="en-US"/>
           </a:p>
@@ -2312,7 +2312,7 @@
           <a:p>
             <a:fld id="{FA0BDF2A-8048-BB44-864C-819C200F781C}" type="datetimeFigureOut">
               <a:rPr lang="en-US" smtClean="0"/>
-              <a:t>1/18/24</a:t>
+              <a:t>1/21/26</a:t>
             </a:fld>
             <a:endParaRPr lang="en-US"/>
           </a:p>
@@ -2425,7 +2425,7 @@
           <a:p>
             <a:fld id="{FA0BDF2A-8048-BB44-864C-819C200F781C}" type="datetimeFigureOut">
               <a:rPr lang="en-US" smtClean="0"/>
-              <a:t>1/18/24</a:t>
+              <a:t>1/21/26</a:t>
             </a:fld>
             <a:endParaRPr lang="en-US"/>
           </a:p>
@@ -2736,7 +2736,7 @@
           <a:p>
             <a:fld id="{FA0BDF2A-8048-BB44-864C-819C200F781C}" type="datetimeFigureOut">
               <a:rPr lang="en-US" smtClean="0"/>
-              <a:t>1/18/24</a:t>
+              <a:t>1/21/26</a:t>
             </a:fld>
             <a:endParaRPr lang="en-US"/>
           </a:p>
@@ -3024,7 +3024,7 @@
           <a:p>
             <a:fld id="{FA0BDF2A-8048-BB44-864C-819C200F781C}" type="datetimeFigureOut">
               <a:rPr lang="en-US" smtClean="0"/>
-              <a:t>1/18/24</a:t>
+              <a:t>1/21/26</a:t>
             </a:fld>
             <a:endParaRPr lang="en-US"/>
           </a:p>
@@ -3265,7 +3265,7 @@
           <a:p>
             <a:fld id="{FA0BDF2A-8048-BB44-864C-819C200F781C}" type="datetimeFigureOut">
               <a:rPr lang="en-US" smtClean="0"/>
-              <a:t>1/18/24</a:t>
+              <a:t>1/21/26</a:t>
             </a:fld>
             <a:endParaRPr lang="en-US"/>
           </a:p>
@@ -4619,7 +4619,7 @@
             </a:r>
             <a:r>
               <a:rPr lang="en-US" sz="1400" dirty="0"/>
-              <a:t> file, knit your document and upload the .html too. </a:t>
+              <a:t> file, knit your document and upload either the .html too. </a:t>
             </a:r>
           </a:p>
         </p:txBody>
